--- a/mkt1107/output/MKT1107_W03_slides.pptx
+++ b/mkt1107/output/MKT1107_W03_slides.pptx
@@ -159,12 +159,12 @@
   <p:extLst>
     <p:ext uri="{521415D9-36F7-43E2-AB2F-B90AF26B5E84}">
       <p14:sectionLst xmlns:p14="http://schemas.microsoft.com/office/powerpoint/2010/main">
-        <p14:section name="Mở đầu" id="{57e6228f-5845-20da-873c-552afcbe3447}">
+        <p14:section name="Mở đầu" id="{86d277ff-cbf7-5c67-30c2-ff9210b1b2bd}">
           <p14:sldIdLst>
             <p14:sldId id="256"/>
           </p14:sldIdLst>
         </p14:section>
-        <p14:section name="S1 · Khởi động — kiểm tra bài tập Buổi 2" id="{9fbcc5f0-38b9-af36-57b5-f54a70ab677b}">
+        <p14:section name="S1 · Khởi động — kiểm tra bài tập Buổi 2" id="{804e0b5a-e3d0-7e25-9860-d5861094cec3}">
           <p14:sldIdLst>
             <p14:sldId id="257"/>
             <p14:sldId id="258"/>
@@ -172,7 +172,7 @@
             <p14:sldId id="260"/>
           </p14:sldIdLst>
         </p14:section>
-        <p14:section name="S2 · 2.2 Trích dẫn trong bài" id="{c583816f-5ce4-e6b4-34b3-ed7ab6df4763}">
+        <p14:section name="S2 · 2.2 Trích dẫn trong bài" id="{171ff6b8-73f4-aaa7-7b78-de5844446557}">
           <p14:sldIdLst>
             <p14:sldId id="261"/>
             <p14:sldId id="262"/>
@@ -189,7 +189,7 @@
             <p14:sldId id="273"/>
           </p14:sldIdLst>
         </p14:section>
-        <p14:section name="S3 · 2.3 Danh mục (1)" id="{0d057970-3566-4e5b-a417-e5d6fc230143}">
+        <p14:section name="S3 · 2.3 Danh mục (1)" id="{b28120ba-9204-d452-1d55-a916efe2f828}">
           <p14:sldIdLst>
             <p14:sldId id="274"/>
             <p14:sldId id="275"/>
@@ -201,7 +201,7 @@
             <p14:sldId id="281"/>
           </p14:sldIdLst>
         </p14:section>
-        <p14:section name="S4 · 2.3 Danh mục (2)" id="{0b690570-843f-c25d-be87-a63a0ccc3444}">
+        <p14:section name="S4 · 2.3 Danh mục (2)" id="{55af0d25-c570-bc27-1188-12f788a68a56}">
           <p14:sldIdLst>
             <p14:sldId id="282"/>
             <p14:sldId id="283"/>
@@ -212,7 +212,7 @@
             <p14:sldId id="288"/>
           </p14:sldIdLst>
         </p14:section>
-        <p14:section name="S5 · Từ danh mục đến tổng quan tài liệu" id="{16195caa-e0cf-caba-d174-95107a6e4dce}">
+        <p14:section name="S5 · Từ danh mục đến tổng quan tài liệu" id="{3564739d-dc44-d65c-18e5-eae0dcbd4150}">
           <p14:sldIdLst>
             <p14:sldId id="289"/>
             <p14:sldId id="290"/>
@@ -226,14 +226,14 @@
             <p14:sldId id="298"/>
           </p14:sldIdLst>
         </p14:section>
-        <p14:section name="S6 · Thực hành nhóm" id="{1e07452b-0799-f09a-4c1f-7e048405d5ce}">
+        <p14:section name="S6 · Thực hành nhóm" id="{cc1c5a77-3e60-0029-2572-ba42721a81ba}">
           <p14:sldIdLst>
             <p14:sldId id="299"/>
             <p14:sldId id="300"/>
             <p14:sldId id="301"/>
           </p14:sldIdLst>
         </p14:section>
-        <p14:section name="S7 · Kết buổi" id="{85d85a9a-a336-9786-3f5b-6e1379ed36e3}">
+        <p14:section name="S7 · Kết buổi" id="{54e998f7-a3c0-affb-1f70-90754086d669}">
           <p14:sldIdLst>
             <p14:sldId id="302"/>
             <p14:sldId id="303"/>
@@ -2859,8 +2859,8 @@
 Dòng 1: trích bằng tên thay vì họ — (Hùng, 2017) phải là (Lê, 2017).
 Dòng 2: ghi đủ họ tên trong danh mục — Lê Quang Hùng (2017) phải là Lê, Q. H. (2017).
 Dòng 3: đảo tên theo kiểu phương Tây — Quang Hung Le (2019) phải là Le, Q. H. (2019).
-Dòng 4: DOI kiểu cũ “doi:” — phải ghi dạng đường dẫn https://doi.org/….
-Dòng 5: trích qua trung gian thiếu năm gốc — phải ghi (Malter, 2020, trích trong Berlian et al., 2023).
+Dòng 4: ghi học vị — “TS. Nguyễn Văn A (2020)” phải là Nguyễn, V. A. (2020); danh mục không ghi ThS., TS., PGS.
+Dòng 5: DOI kiểu cũ “doi:” — phải ghi dạng đường dẫn https://doi.org/….
 Ghi nhận nhanh dòng nào nhiều nhóm giơ tay nhất để nhắc lại khi đi các bàn ở chặng sửa danh mục.
 Chuyển sang phần 2 của bảng.</a:t>
             </a:r>
@@ -2951,8 +2951,8 @@
             <a:r>
               <a:rPr lang="en-US" dirty="0"/>
               <a:t>Phần 2 của bảng lỗi. Tiếp tục cách làm: đọc từng dòng, nhóm nào đã mắc thì giơ tay.
-Dòng 6: ghi học vị — “TS. Nguyễn Văn A (2020)” phải là Nguyễn, V. A. (2020); trên slide rút gọn bỏ năm.
-Dòng 7: dùng “et al.” cho bài chỉ có hai tác giả — phải ghi đủ (Kotler &amp; Keller, 2012).
+Dòng 6 (“Thừa et al.”): dùng “et al.” cho bài chỉ có hai tác giả — phải ghi đủ (Kotler &amp; Keller, 2012).
+Dòng 7: trích qua trung gian thiếu năm gốc — phải ghi (Malter, 2020, trích trong Berlian et al., 2023).
 Dòng 8 (“Thiếu mục”): trích trong bài nhưng thiếu trong danh mục — mỗi trích dẫn phải có một mục, và ngược lại; dùng mẹo đánh dấu.
 Dòng 9 và 10 — nói chậm: liệt kê tài liệu gốc chưa đọc, và (dòng “Trích AI gợi ý”) đưa trích dẫn do AI gợi ý vào bài mà không kiểm tra. Nhấn: “Hai dòng cuối không chỉ là lỗi định dạng — đây là vấn đề liêm chính học thuật. Trích một tài liệu không tồn tại là lỗi của người nộp bài, không phải của AI.”
 Nối sang Buổi 4: tuần sau các bạn sẽ tự kiểm chứng xem AI có bịa tài liệu không.
@@ -22565,7 +22565,7 @@
                 <a:ea typeface="Alexandria" pitchFamily="34" charset="-122"/>
                 <a:cs typeface="Alexandria" pitchFamily="34" charset="-120"/>
               </a:rPr>
-              <a:t>Mười lỗi APA hay gặp nhất (1/2): tên tác giả, DOI, trích qua trung gian</a:t>
+              <a:t>Mười lỗi APA hay gặp nhất (1/2): tên, học vị, DOI</a:t>
             </a:r>
             <a:endParaRPr lang="en-US" sz="3400" dirty="0"/>
           </a:p>
@@ -22594,9 +22594,9 @@
             <a:tbl>
               <a:tblPr/>
               <a:tblGrid>
-                <a:gridCol w="1826190"/>
-                <a:gridCol w="4363866"/>
-                <a:gridCol w="4874184"/>
+                <a:gridCol w="2793761"/>
+                <a:gridCol w="4138618"/>
+                <a:gridCol w="4131861"/>
               </a:tblGrid>
               <a:tr h="524256">
                 <a:tc>
@@ -22813,7 +22813,7 @@
                   </a:tcPr>
                 </a:tc>
               </a:tr>
-              <a:tr h="920496">
+              <a:tr h="524256">
                 <a:tc>
                   <a:txBody>
                     <a:bodyPr/>
@@ -23028,7 +23028,7 @@
                   </a:tcPr>
                 </a:tc>
               </a:tr>
-              <a:tr h="920496">
+              <a:tr h="524256">
                 <a:tc>
                   <a:txBody>
                     <a:bodyPr/>
@@ -23243,7 +23243,7 @@
                   </a:tcPr>
                 </a:tc>
               </a:tr>
-              <a:tr h="920496">
+              <a:tr h="524256">
                 <a:tc>
                   <a:txBody>
                     <a:bodyPr/>
@@ -23458,7 +23458,7 @@
                   </a:tcPr>
                 </a:tc>
               </a:tr>
-              <a:tr h="920496">
+              <a:tr h="524256">
                 <a:tc>
                   <a:txBody>
                     <a:bodyPr/>
@@ -23479,7 +23479,7 @@
                           <a:ea typeface="Alexandria" pitchFamily="34" charset="-122"/>
                           <a:cs typeface="Alexandria" pitchFamily="34" charset="-120"/>
                         </a:rPr>
-                        <a:t>DOI kiểu cũ</a:t>
+                        <a:t>Ghi học vị</a:t>
                       </a:r>
                       <a:endParaRPr lang="en-US" sz="2400" dirty="0">
                         <a:latin typeface="Alexandria" charset="0"/>
@@ -23550,7 +23550,7 @@
                           <a:ea typeface="Alexandria" pitchFamily="34" charset="-122"/>
                           <a:cs typeface="Alexandria" pitchFamily="34" charset="-120"/>
                         </a:rPr>
-                        <a:t>doi:10.13106/…</a:t>
+                        <a:t>TS. Nguyễn Văn A (2020)</a:t>
                       </a:r>
                       <a:endParaRPr lang="en-US" sz="2400" dirty="0">
                         <a:latin typeface="Alexandria" charset="0"/>
@@ -23621,7 +23621,7 @@
                           <a:ea typeface="Alexandria" pitchFamily="34" charset="-122"/>
                           <a:cs typeface="Alexandria" pitchFamily="34" charset="-120"/>
                         </a:rPr>
-                        <a:t>https://doi.org/…</a:t>
+                        <a:t>Nguyễn, V. A. (2020)</a:t>
                       </a:r>
                       <a:endParaRPr lang="en-US" sz="2400" dirty="0">
                         <a:latin typeface="Alexandria" charset="0"/>
@@ -23673,7 +23673,7 @@
                   </a:tcPr>
                 </a:tc>
               </a:tr>
-              <a:tr h="920496">
+              <a:tr h="524256">
                 <a:tc>
                   <a:txBody>
                     <a:bodyPr/>
@@ -23694,7 +23694,7 @@
                           <a:ea typeface="Alexandria" pitchFamily="34" charset="-122"/>
                           <a:cs typeface="Alexandria" pitchFamily="34" charset="-120"/>
                         </a:rPr>
-                        <a:t>Thiếu năm gốc</a:t>
+                        <a:t>DOI kiểu cũ</a:t>
                       </a:r>
                       <a:endParaRPr lang="en-US" sz="2400" dirty="0">
                         <a:latin typeface="Alexandria" charset="0"/>
@@ -23765,7 +23765,7 @@
                           <a:ea typeface="Alexandria" pitchFamily="34" charset="-122"/>
                           <a:cs typeface="Alexandria" pitchFamily="34" charset="-120"/>
                         </a:rPr>
-                        <a:t>(Malter et al., trích từ Berlian et al. 2023)</a:t>
+                        <a:t>doi:10.13106/…</a:t>
                       </a:r>
                       <a:endParaRPr lang="en-US" sz="2400" dirty="0">
                         <a:latin typeface="Alexandria" charset="0"/>
@@ -23836,7 +23836,7 @@
                           <a:ea typeface="Alexandria" pitchFamily="34" charset="-122"/>
                           <a:cs typeface="Alexandria" pitchFamily="34" charset="-120"/>
                         </a:rPr>
-                        <a:t>(Malter, 2020, trích trong Berlian et al., 2023)</a:t>
+                        <a:t>https://doi.org/10.13106/…</a:t>
                       </a:r>
                       <a:endParaRPr lang="en-US" sz="2400" dirty="0">
                         <a:latin typeface="Alexandria" charset="0"/>
@@ -24060,7 +24060,7 @@
                 <a:ea typeface="Alexandria" pitchFamily="34" charset="-122"/>
                 <a:cs typeface="Alexandria" pitchFamily="34" charset="-120"/>
               </a:rPr>
-              <a:t>Mười lỗi APA hay gặp nhất (2/2): học vị, et al., khớp danh mục, liêm chính</a:t>
+              <a:t>Mười lỗi APA hay gặp nhất (2/2): et al., trích trung gian, khớp danh mục, liêm chính</a:t>
             </a:r>
             <a:endParaRPr lang="en-US" sz="3400" dirty="0"/>
           </a:p>
@@ -24089,9 +24089,9 @@
             <a:tbl>
               <a:tblPr/>
               <a:tblGrid>
-                <a:gridCol w="3664872"/>
-                <a:gridCol w="3267645"/>
-                <a:gridCol w="4131723"/>
+                <a:gridCol w="2432746"/>
+                <a:gridCol w="4077341"/>
+                <a:gridCol w="4554152"/>
               </a:tblGrid>
               <a:tr h="524256">
                 <a:tc>
@@ -24329,7 +24329,7 @@
                           <a:ea typeface="Alexandria" pitchFamily="34" charset="-122"/>
                           <a:cs typeface="Alexandria" pitchFamily="34" charset="-120"/>
                         </a:rPr>
-                        <a:t>Ghi học vị</a:t>
+                        <a:t>Thừa et al.</a:t>
                       </a:r>
                       <a:endParaRPr lang="en-US" sz="2400" dirty="0">
                         <a:latin typeface="Alexandria" charset="0"/>
@@ -24400,7 +24400,7 @@
                           <a:ea typeface="Alexandria" pitchFamily="34" charset="-122"/>
                           <a:cs typeface="Alexandria" pitchFamily="34" charset="-120"/>
                         </a:rPr>
-                        <a:t>TS. Nguyễn Văn A</a:t>
+                        <a:t>(Kotler et al., 2012)</a:t>
                       </a:r>
                       <a:endParaRPr lang="en-US" sz="2400" dirty="0">
                         <a:latin typeface="Alexandria" charset="0"/>
@@ -24471,7 +24471,7 @@
                           <a:ea typeface="Alexandria" pitchFamily="34" charset="-122"/>
                           <a:cs typeface="Alexandria" pitchFamily="34" charset="-120"/>
                         </a:rPr>
-                        <a:t>Nguyễn, V. A.</a:t>
+                        <a:t>(Kotler &amp; Keller, 2012)</a:t>
                       </a:r>
                       <a:endParaRPr lang="en-US" sz="2400" dirty="0">
                         <a:latin typeface="Alexandria" charset="0"/>
@@ -24523,7 +24523,7 @@
                   </a:tcPr>
                 </a:tc>
               </a:tr>
-              <a:tr h="524256">
+              <a:tr h="920496">
                 <a:tc>
                   <a:txBody>
                     <a:bodyPr/>
@@ -24544,7 +24544,7 @@
                           <a:ea typeface="Alexandria" pitchFamily="34" charset="-122"/>
                           <a:cs typeface="Alexandria" pitchFamily="34" charset="-120"/>
                         </a:rPr>
-                        <a:t>et al. với 2 tác giả</a:t>
+                        <a:t>Thiếu năm gốc</a:t>
                       </a:r>
                       <a:endParaRPr lang="en-US" sz="2400" dirty="0">
                         <a:latin typeface="Alexandria" charset="0"/>
@@ -24615,7 +24615,7 @@
                           <a:ea typeface="Alexandria" pitchFamily="34" charset="-122"/>
                           <a:cs typeface="Alexandria" pitchFamily="34" charset="-120"/>
                         </a:rPr>
-                        <a:t>(Kotler et al., 2012)</a:t>
+                        <a:t>(Malter et al., trích từ Berlian et al. 2023)</a:t>
                       </a:r>
                       <a:endParaRPr lang="en-US" sz="2400" dirty="0">
                         <a:latin typeface="Alexandria" charset="0"/>
@@ -24686,7 +24686,7 @@
                           <a:ea typeface="Alexandria" pitchFamily="34" charset="-122"/>
                           <a:cs typeface="Alexandria" pitchFamily="34" charset="-120"/>
                         </a:rPr>
-                        <a:t>(Kotler &amp; Keller, 2012)</a:t>
+                        <a:t>(Malter, 2020, trích trong Berlian et al., 2023)</a:t>
                       </a:r>
                       <a:endParaRPr lang="en-US" sz="2400" dirty="0">
                         <a:latin typeface="Alexandria" charset="0"/>
@@ -25168,7 +25168,7 @@
                   </a:tcPr>
                 </a:tc>
               </a:tr>
-              <a:tr h="920496">
+              <a:tr h="524256">
                 <a:tc>
                   <a:txBody>
                     <a:bodyPr/>

--- a/mkt1107/output/MKT1107_W03_slides.pptx
+++ b/mkt1107/output/MKT1107_W03_slides.pptx
@@ -159,12 +159,12 @@
   <p:extLst>
     <p:ext uri="{521415D9-36F7-43E2-AB2F-B90AF26B5E84}">
       <p14:sectionLst xmlns:p14="http://schemas.microsoft.com/office/powerpoint/2010/main">
-        <p14:section name="Mở đầu" id="{86d277ff-cbf7-5c67-30c2-ff9210b1b2bd}">
+        <p14:section name="Mở đầu" id="{cbe553d5-036f-a820-2ca4-e3924f70d53f}">
           <p14:sldIdLst>
             <p14:sldId id="256"/>
           </p14:sldIdLst>
         </p14:section>
-        <p14:section name="S1 · Khởi động — kiểm tra bài tập Buổi 2" id="{804e0b5a-e3d0-7e25-9860-d5861094cec3}">
+        <p14:section name="S1 · Khởi động — kiểm tra bài tập Buổi 2" id="{5280387e-13cf-d81b-2efc-d3969dc87654}">
           <p14:sldIdLst>
             <p14:sldId id="257"/>
             <p14:sldId id="258"/>
@@ -172,7 +172,7 @@
             <p14:sldId id="260"/>
           </p14:sldIdLst>
         </p14:section>
-        <p14:section name="S2 · 2.2 Trích dẫn trong bài" id="{171ff6b8-73f4-aaa7-7b78-de5844446557}">
+        <p14:section name="S2 · 2.2 Trích dẫn trong bài" id="{2f54b6e6-9a4d-9a47-ea17-f07931ce6a73}">
           <p14:sldIdLst>
             <p14:sldId id="261"/>
             <p14:sldId id="262"/>
@@ -189,7 +189,7 @@
             <p14:sldId id="273"/>
           </p14:sldIdLst>
         </p14:section>
-        <p14:section name="S3 · 2.3 Danh mục (1)" id="{b28120ba-9204-d452-1d55-a916efe2f828}">
+        <p14:section name="S3 · 2.3 Danh mục (1)" id="{8aae7eed-0530-6cb8-5376-71e2bdf31c9d}">
           <p14:sldIdLst>
             <p14:sldId id="274"/>
             <p14:sldId id="275"/>
@@ -201,7 +201,7 @@
             <p14:sldId id="281"/>
           </p14:sldIdLst>
         </p14:section>
-        <p14:section name="S4 · 2.3 Danh mục (2)" id="{55af0d25-c570-bc27-1188-12f788a68a56}">
+        <p14:section name="S4 · 2.3 Danh mục (2)" id="{b7a8a7f2-c823-9f3a-fc12-1280e308d99c}">
           <p14:sldIdLst>
             <p14:sldId id="282"/>
             <p14:sldId id="283"/>
@@ -212,7 +212,7 @@
             <p14:sldId id="288"/>
           </p14:sldIdLst>
         </p14:section>
-        <p14:section name="S5 · Từ danh mục đến tổng quan tài liệu" id="{3564739d-dc44-d65c-18e5-eae0dcbd4150}">
+        <p14:section name="S5 · Từ danh mục đến tổng quan tài liệu" id="{bf63b27b-30eb-ec79-f8a1-de09985370ce}">
           <p14:sldIdLst>
             <p14:sldId id="289"/>
             <p14:sldId id="290"/>
@@ -226,14 +226,14 @@
             <p14:sldId id="298"/>
           </p14:sldIdLst>
         </p14:section>
-        <p14:section name="S6 · Thực hành nhóm" id="{cc1c5a77-3e60-0029-2572-ba42721a81ba}">
+        <p14:section name="S6 · Thực hành nhóm" id="{f90abd37-983e-7d54-9742-f3ef9d25c291}">
           <p14:sldIdLst>
             <p14:sldId id="299"/>
             <p14:sldId id="300"/>
             <p14:sldId id="301"/>
           </p14:sldIdLst>
         </p14:section>
-        <p14:section name="S7 · Kết buổi" id="{54e998f7-a3c0-affb-1f70-90754086d669}">
+        <p14:section name="S7 · Kết buổi" id="{753ad874-df3c-737b-e64f-4db2e6b04f69}">
           <p14:sldIdLst>
             <p14:sldId id="302"/>
             <p14:sldId id="303"/>

--- a/mkt1107/output/MKT1107_W03_slides.pptx
+++ b/mkt1107/output/MKT1107_W03_slides.pptx
@@ -159,12 +159,12 @@
   <p:extLst>
     <p:ext uri="{521415D9-36F7-43E2-AB2F-B90AF26B5E84}">
       <p14:sectionLst xmlns:p14="http://schemas.microsoft.com/office/powerpoint/2010/main">
-        <p14:section name="Mở đầu" id="{cbe553d5-036f-a820-2ca4-e3924f70d53f}">
+        <p14:section name="Mở đầu" id="{2181b830-828f-dffb-bff5-a180dd4b8262}">
           <p14:sldIdLst>
             <p14:sldId id="256"/>
           </p14:sldIdLst>
         </p14:section>
-        <p14:section name="S1 · Khởi động — kiểm tra bài tập Buổi 2" id="{5280387e-13cf-d81b-2efc-d3969dc87654}">
+        <p14:section name="S1 · Khởi động — kiểm tra bài tập Buổi 2" id="{e94bafae-b53e-407d-e886-1fe2ecaa6676}">
           <p14:sldIdLst>
             <p14:sldId id="257"/>
             <p14:sldId id="258"/>
@@ -172,7 +172,7 @@
             <p14:sldId id="260"/>
           </p14:sldIdLst>
         </p14:section>
-        <p14:section name="S2 · 2.2 Trích dẫn trong bài" id="{2f54b6e6-9a4d-9a47-ea17-f07931ce6a73}">
+        <p14:section name="S2 · 2.2 Trích dẫn trong bài" id="{35953d24-c6d8-0ff9-87c8-6d87caea210b}">
           <p14:sldIdLst>
             <p14:sldId id="261"/>
             <p14:sldId id="262"/>
@@ -189,7 +189,7 @@
             <p14:sldId id="273"/>
           </p14:sldIdLst>
         </p14:section>
-        <p14:section name="S3 · 2.3 Danh mục (1)" id="{8aae7eed-0530-6cb8-5376-71e2bdf31c9d}">
+        <p14:section name="S3 · 2.3 Danh mục (1)" id="{8de1f077-ca29-746b-563f-2e7f8cf18663}">
           <p14:sldIdLst>
             <p14:sldId id="274"/>
             <p14:sldId id="275"/>
@@ -201,7 +201,7 @@
             <p14:sldId id="281"/>
           </p14:sldIdLst>
         </p14:section>
-        <p14:section name="S4 · 2.3 Danh mục (2)" id="{b7a8a7f2-c823-9f3a-fc12-1280e308d99c}">
+        <p14:section name="S4 · 2.3 Danh mục (2)" id="{0afbe1f6-4f22-e931-7dab-657539a29f40}">
           <p14:sldIdLst>
             <p14:sldId id="282"/>
             <p14:sldId id="283"/>
@@ -212,7 +212,7 @@
             <p14:sldId id="288"/>
           </p14:sldIdLst>
         </p14:section>
-        <p14:section name="S5 · Từ danh mục đến tổng quan tài liệu" id="{bf63b27b-30eb-ec79-f8a1-de09985370ce}">
+        <p14:section name="S5 · Từ danh mục đến tổng quan tài liệu" id="{0e555abb-49d5-dd23-fa33-987e28e02a51}">
           <p14:sldIdLst>
             <p14:sldId id="289"/>
             <p14:sldId id="290"/>
@@ -226,14 +226,14 @@
             <p14:sldId id="298"/>
           </p14:sldIdLst>
         </p14:section>
-        <p14:section name="S6 · Thực hành nhóm" id="{f90abd37-983e-7d54-9742-f3ef9d25c291}">
+        <p14:section name="S6 · Thực hành nhóm" id="{5959b9c1-2155-d47a-46e8-74095fd40aaa}">
           <p14:sldIdLst>
             <p14:sldId id="299"/>
             <p14:sldId id="300"/>
             <p14:sldId id="301"/>
           </p14:sldIdLst>
         </p14:section>
-        <p14:section name="S7 · Kết buổi" id="{753ad874-df3c-737b-e64f-4db2e6b04f69}">
+        <p14:section name="S7 · Kết buổi" id="{1319ac14-5e2d-0bd8-58aa-0441a62dd47b}">
           <p14:sldIdLst>
             <p14:sldId id="302"/>
             <p14:sldId id="303"/>
@@ -6452,7 +6452,7 @@
                 <a:ea typeface="Alexandria" pitchFamily="34" charset="-122"/>
                 <a:cs typeface="Alexandria" pitchFamily="34" charset="-120"/>
               </a:rPr>
-              <a:t>Bài 2 (tiếp): Tham khảo và trích dẫn tài liệu</a:t>
+              <a:t>Bài 2 (tiếp): Tham khảo và trích dẫn tài liệu</a:t>
             </a:r>
             <a:endParaRPr lang="en-US" sz="4800" dirty="0"/>
           </a:p>
@@ -6835,7 +6835,7 @@
       </p:sp>
       <p:sp>
         <p:nvSpPr>
-          <p:cNvPr id="11" name="Thẻ Cùng tác giả, cùng năm"/>
+          <p:cNvPr id="11" name="Thẻ Cùng tác giả, cùng năm"/>
           <p:cNvSpPr/>
           <p:nvPr/>
         </p:nvSpPr>
@@ -6950,7 +6950,7 @@
                 <a:ea typeface="Alexandria" pitchFamily="34" charset="-122"/>
                 <a:cs typeface="Alexandria" pitchFamily="34" charset="-120"/>
               </a:rPr>
-              <a:t>Cùng tác giả, cùng năm</a:t>
+              <a:t>Cùng tác giả, cùng năm</a:t>
             </a:r>
             <a:endParaRPr lang="en-US" sz="2800" dirty="0"/>
           </a:p>
@@ -9548,7 +9548,7 @@
                 <a:ea typeface="Alexandria" pitchFamily="34" charset="-122"/>
                 <a:cs typeface="Alexandria" pitchFamily="34" charset="-120"/>
               </a:rPr>
-              <a:t>Berlian et al. (2023)</a:t>
+              <a:t>Berlian et al. (2023)</a:t>
             </a:r>
             <a:endParaRPr lang="en-US" sz="2800" dirty="0"/>
           </a:p>
@@ -14882,7 +14882,7 @@
                 <a:ea typeface="Alexandria" pitchFamily="34" charset="-122"/>
                 <a:cs typeface="Alexandria" pitchFamily="34" charset="-120"/>
               </a:rPr>
-              <a:t>Tên tác phẩm.</a:t>
+              <a:t>Tên tác phẩm.</a:t>
             </a:r>
             <a:endParaRPr lang="en-US" sz="2800" dirty="0"/>
           </a:p>
@@ -15551,7 +15551,7 @@
                 <a:ea typeface="Alexandria" pitchFamily="34" charset="-122"/>
                 <a:cs typeface="Alexandria" pitchFamily="34" charset="-120"/>
               </a:rPr>
-              <a:t>A–Z theo họ tác giả đầu; một danh mục chung Việt – Anh; không đánh số</a:t>
+              <a:t>A–Z theo họ tác giả đầu; một danh mục chung Việt – Anh; không đánh số</a:t>
             </a:r>
             <a:endParaRPr lang="en-US" sz="2600" dirty="0"/>
           </a:p>
@@ -21911,7 +21911,7 @@
                           <a:ea typeface="Alexandria" pitchFamily="34" charset="-122"/>
                           <a:cs typeface="Alexandria" pitchFamily="34" charset="-120"/>
                         </a:rPr>
-                        <a:t>Nguyễn, Đ. T., &amp; Nguyễn, T. M. T. (2015).</a:t>
+                        <a:t>Nguyễn, Đ. T., &amp; Nguyễn, T. M. T. (2015).</a:t>
                       </a:r>
                       <a:endParaRPr lang="en-US" sz="2400" dirty="0">
                         <a:latin typeface="Alexandria" charset="0"/>
@@ -22199,7 +22199,7 @@
                           <a:ea typeface="Alexandria" pitchFamily="34" charset="-122"/>
                           <a:cs typeface="Alexandria" pitchFamily="34" charset="-120"/>
                         </a:rPr>
-                        <a:t>Nguyễn Như Quỳnh Đoan</a:t>
+                        <a:t>Nguyễn Như Quỳnh Đoan</a:t>
                       </a:r>
                       <a:endParaRPr lang="en-US" sz="2400" dirty="0">
                         <a:latin typeface="Alexandria" charset="0"/>
@@ -24544,7 +24544,7 @@
                           <a:ea typeface="Alexandria" pitchFamily="34" charset="-122"/>
                           <a:cs typeface="Alexandria" pitchFamily="34" charset="-120"/>
                         </a:rPr>
-                        <a:t>Thiếu năm gốc</a:t>
+                        <a:t>Thiếu năm gốc</a:t>
                       </a:r>
                       <a:endParaRPr lang="en-US" sz="2400" dirty="0">
                         <a:latin typeface="Alexandria" charset="0"/>
@@ -25728,7 +25728,7 @@
       </p:sp>
       <p:sp>
         <p:nvSpPr>
-          <p:cNvPr id="11" name="Thẻ Tách Việt – Anh"/>
+          <p:cNvPr id="11" name="Thẻ Tách Việt – Anh"/>
           <p:cNvSpPr/>
           <p:nvPr/>
         </p:nvSpPr>
@@ -25843,7 +25843,7 @@
                 <a:ea typeface="Alexandria" pitchFamily="34" charset="-122"/>
                 <a:cs typeface="Alexandria" pitchFamily="34" charset="-120"/>
               </a:rPr>
-              <a:t>Tách Việt – Anh</a:t>
+              <a:t>Tách Việt – Anh</a:t>
             </a:r>
             <a:endParaRPr lang="en-US" sz="2800" dirty="0"/>
           </a:p>
@@ -25885,7 +25885,7 @@
                 <a:ea typeface="Alexandria" pitchFamily="34" charset="-122"/>
                 <a:cs typeface="Alexandria" pitchFamily="34" charset="-120"/>
               </a:rPr>
-              <a:t>Một danh mục chung cho mọi tài liệu</a:t>
+              <a:t>Một danh mục chung cho mọi tài liệu</a:t>
             </a:r>
             <a:endParaRPr lang="en-US" sz="2600" dirty="0"/>
           </a:p>
@@ -26807,7 +26807,7 @@
                 <a:ea typeface="Alexandria" pitchFamily="34" charset="-122"/>
                 <a:cs typeface="Alexandria" pitchFamily="34" charset="-120"/>
               </a:rPr>
-              <a:t>Những gì đã được nghiên cứu về chủ đề</a:t>
+              <a:t>Những gì đã được nghiên cứu về chủ đề</a:t>
             </a:r>
             <a:endParaRPr lang="en-US" sz="2600" dirty="0"/>
           </a:p>
@@ -26815,7 +26815,7 @@
       </p:sp>
       <p:sp>
         <p:nvSpPr>
-          <p:cNvPr id="11" name="Thẻ Khoảng trống"/>
+          <p:cNvPr id="11" name="Thẻ Chỗ trống"/>
           <p:cNvSpPr/>
           <p:nvPr/>
         </p:nvSpPr>
@@ -26903,7 +26903,7 @@
         <p:spPr>
           <a:xfrm>
             <a:off x="5151120" y="1920240"/>
-            <a:ext cx="2499360" cy="1076960"/>
+            <a:ext cx="2499360" cy="614680"/>
           </a:xfrm>
           <a:prstGeom prst="rect">
             <a:avLst/>
@@ -26930,7 +26930,7 @@
                 <a:ea typeface="Alexandria" pitchFamily="34" charset="-122"/>
                 <a:cs typeface="Alexandria" pitchFamily="34" charset="-120"/>
               </a:rPr>
-              <a:t>Khoảng trống</a:t>
+              <a:t>Chỗ trống</a:t>
             </a:r>
             <a:endParaRPr lang="en-US" sz="2800" dirty="0"/>
           </a:p>
@@ -26944,8 +26944,8 @@
         </p:nvSpPr>
         <p:spPr>
           <a:xfrm>
-            <a:off x="4465320" y="3042920"/>
-            <a:ext cx="3230880" cy="1615440"/>
+            <a:off x="4465320" y="2580640"/>
+            <a:ext cx="3230880" cy="2077720"/>
           </a:xfrm>
           <a:prstGeom prst="rect">
             <a:avLst/>
@@ -26980,7 +26980,7 @@
       </p:sp>
       <p:sp>
         <p:nvSpPr>
-          <p:cNvPr id="16" name="Thẻ Tầm quan trọng"/>
+          <p:cNvPr id="16" name="Thẻ Tầm quan trọng"/>
           <p:cNvSpPr/>
           <p:nvPr/>
         </p:nvSpPr>
@@ -27095,7 +27095,7 @@
                 <a:ea typeface="Alexandria" pitchFamily="34" charset="-122"/>
                 <a:cs typeface="Alexandria" pitchFamily="34" charset="-120"/>
               </a:rPr>
-              <a:t>Tầm quan trọng</a:t>
+              <a:t>Tầm quan trọng</a:t>
             </a:r>
             <a:endParaRPr lang="en-US" sz="2800" dirty="0"/>
           </a:p>
@@ -27137,7 +27137,7 @@
                 <a:ea typeface="Alexandria" pitchFamily="34" charset="-122"/>
                 <a:cs typeface="Alexandria" pitchFamily="34" charset="-120"/>
               </a:rPr>
-              <a:t>Vì sao nghiên cứu của nhóm cần thiết</a:t>
+              <a:t>Vì sao nghiên cứu của nhóm cần thiết</a:t>
             </a:r>
             <a:endParaRPr lang="en-US" sz="2600" dirty="0"/>
           </a:p>
@@ -27611,7 +27611,7 @@
                 <a:ea typeface="Alexandria" pitchFamily="34" charset="-122"/>
                 <a:cs typeface="Alexandria" pitchFamily="34" charset="-120"/>
               </a:rPr>
-              <a:t>Nguồn C (2023), sinh viên đặt qua ứng dụng: khuyến mãi và giá ảnh hưởng nhất.</a:t>
+              <a:t>Nguồn C (2023), sinh viên đặt qua ứng dụng: khuyến mãi và giá ảnh hưởng nhất.</a:t>
             </a:r>
             <a:endParaRPr lang="en-US" sz="2400" dirty="0"/>
           </a:p>
@@ -27734,7 +27734,7 @@
                 <a:ea typeface="Alexandria" pitchFamily="34" charset="-122"/>
                 <a:cs typeface="Alexandria" pitchFamily="34" charset="-120"/>
               </a:rPr>
-              <a:t>Đoạn này sai ở đâu?</a:t>
+              <a:t>Đoạn này sai ở đâu?</a:t>
             </a:r>
             <a:endParaRPr lang="en-US" sz="3000" dirty="0"/>
           </a:p>
@@ -30247,7 +30247,7 @@
                           <a:ea typeface="Alexandria" pitchFamily="34" charset="-122"/>
                           <a:cs typeface="Alexandria" pitchFamily="34" charset="-120"/>
                         </a:rPr>
-                        <a:t>C (2023): SV, qua ứng dụng</a:t>
+                        <a:t>C (2023): SV, qua ứng dụng</a:t>
                       </a:r>
                       <a:endParaRPr lang="en-US" sz="2400" dirty="0">
                         <a:latin typeface="Alexandria" charset="0"/>
@@ -33114,7 +33114,7 @@
                 <a:ea typeface="Alexandria" pitchFamily="34" charset="-122"/>
                 <a:cs typeface="Alexandria" pitchFamily="34" charset="-120"/>
               </a:rPr>
-              <a:t>“Mình nghĩ giới trẻ bây giờ thích mua mỹ phẩm nội địa hơn.”</a:t>
+              <a:t>“Mình nghĩ giới trẻ bây giờ thích mua mỹ phẩm nội địa hơn.”</a:t>
             </a:r>
             <a:endParaRPr lang="en-US" sz="4000" dirty="0"/>
           </a:p>
@@ -35693,7 +35693,7 @@
                 <a:ea typeface="Alexandria" pitchFamily="34" charset="-122"/>
                 <a:cs typeface="Alexandria" pitchFamily="34" charset="-120"/>
               </a:rPr>
-              <a:t>DOI https; trang gạch ngang?</a:t>
+              <a:t>DOI https; trang gạch ngang?</a:t>
             </a:r>
             <a:endParaRPr lang="en-US" sz="2500" dirty="0"/>
           </a:p>
@@ -37461,7 +37461,7 @@
       </p:sp>
       <p:sp>
         <p:nvSpPr>
-          <p:cNvPr id="16" name="Thẻ Đề và tiêu chí"/>
+          <p:cNvPr id="16" name="Thẻ Đề và tiêu chí"/>
           <p:cNvSpPr/>
           <p:nvPr/>
         </p:nvSpPr>
@@ -37576,7 +37576,7 @@
                 <a:ea typeface="Alexandria" pitchFamily="34" charset="-122"/>
                 <a:cs typeface="Alexandria" pitchFamily="34" charset="-120"/>
               </a:rPr>
-              <a:t>Đề và tiêu chí</a:t>
+              <a:t>Đề và tiêu chí</a:t>
             </a:r>
             <a:endParaRPr lang="en-US" sz="2800" dirty="0"/>
           </a:p>
@@ -39080,7 +39080,7 @@
                 <a:ea typeface="Alexandria" pitchFamily="34" charset="-122"/>
                 <a:cs typeface="Alexandria" pitchFamily="34" charset="-120"/>
               </a:rPr>
-              <a:t>Tài liệu AI gợi ý đã kiểm chứng</a:t>
+              <a:t>Tài liệu AI gợi ý đã kiểm chứng</a:t>
             </a:r>
             <a:endParaRPr lang="en-US" sz="2600" dirty="0"/>
           </a:p>
@@ -42980,11 +42980,11 @@
         <p:spPr>
           <a:xfrm>
             <a:off x="548640" y="4907280"/>
-            <a:ext cx="11064240" cy="1102360"/>
+            <a:ext cx="11064240" cy="685800"/>
           </a:xfrm>
           <a:prstGeom prst="roundRect">
             <a:avLst>
-              <a:gd name="adj" fmla="val 14931"/>
+              <a:gd name="adj" fmla="val 24000"/>
             </a:avLst>
           </a:prstGeom>
           <a:solidFill>
@@ -43001,7 +43001,7 @@
         </p:nvSpPr>
         <p:spPr>
           <a:xfrm>
-            <a:off x="731520" y="5229860"/>
+            <a:off x="731520" y="5021580"/>
             <a:ext cx="457200" cy="457200"/>
           </a:xfrm>
           <a:prstGeom prst="ellipse">
@@ -43021,7 +43021,7 @@
         </p:nvSpPr>
         <p:spPr>
           <a:xfrm>
-            <a:off x="731520" y="5229860"/>
+            <a:off x="731520" y="5021580"/>
             <a:ext cx="457200" cy="457200"/>
           </a:xfrm>
           <a:prstGeom prst="rect">
@@ -43061,7 +43061,7 @@
         <p:spPr>
           <a:xfrm>
             <a:off x="1325880" y="4907280"/>
-            <a:ext cx="10149840" cy="1102360"/>
+            <a:ext cx="10149840" cy="685800"/>
           </a:xfrm>
           <a:prstGeom prst="rect">
             <a:avLst/>
@@ -43088,7 +43088,7 @@
                 <a:ea typeface="Alexandria" pitchFamily="34" charset="-122"/>
                 <a:cs typeface="Alexandria" pitchFamily="34" charset="-120"/>
               </a:rPr>
-              <a:t>Từ 3 tác giả: tác giả đầu + et al. / và cộng sự — điểm mới của APA 7</a:t>
+              <a:t>Từ 3 tác giả: tác giả đầu + et al. / và cộng sự — mới ở APA 7</a:t>
             </a:r>
             <a:endParaRPr lang="en-US" sz="2600" dirty="0"/>
           </a:p>

--- a/mkt1107/output/MKT1107_W03_slides.pptx
+++ b/mkt1107/output/MKT1107_W03_slides.pptx
@@ -159,12 +159,12 @@
   <p:extLst>
     <p:ext uri="{521415D9-36F7-43E2-AB2F-B90AF26B5E84}">
       <p14:sectionLst xmlns:p14="http://schemas.microsoft.com/office/powerpoint/2010/main">
-        <p14:section name="Mở đầu" id="{2181b830-828f-dffb-bff5-a180dd4b8262}">
+        <p14:section name="Mở đầu" id="{64d14861-3353-3029-f1b5-7fcbfc37e305}">
           <p14:sldIdLst>
             <p14:sldId id="256"/>
           </p14:sldIdLst>
         </p14:section>
-        <p14:section name="S1 · Khởi động — kiểm tra bài tập Buổi 2" id="{e94bafae-b53e-407d-e886-1fe2ecaa6676}">
+        <p14:section name="S1 · Khởi động — kiểm tra bài tập Buổi 2" id="{594b0ba9-9dd4-c696-1b73-52ff9ec24db0}">
           <p14:sldIdLst>
             <p14:sldId id="257"/>
             <p14:sldId id="258"/>
@@ -172,7 +172,7 @@
             <p14:sldId id="260"/>
           </p14:sldIdLst>
         </p14:section>
-        <p14:section name="S2 · 2.2 Trích dẫn trong bài" id="{35953d24-c6d8-0ff9-87c8-6d87caea210b}">
+        <p14:section name="S2 · 2.2 Trích dẫn trong bài" id="{88ee72c9-7fe5-a7a6-2020-06d769811219}">
           <p14:sldIdLst>
             <p14:sldId id="261"/>
             <p14:sldId id="262"/>
@@ -189,7 +189,7 @@
             <p14:sldId id="273"/>
           </p14:sldIdLst>
         </p14:section>
-        <p14:section name="S3 · 2.3 Danh mục (1)" id="{8de1f077-ca29-746b-563f-2e7f8cf18663}">
+        <p14:section name="S3 · 2.3 Danh mục (1)" id="{462b20b9-71dc-e9af-c5e3-a4f8f3c888de}">
           <p14:sldIdLst>
             <p14:sldId id="274"/>
             <p14:sldId id="275"/>
@@ -201,7 +201,7 @@
             <p14:sldId id="281"/>
           </p14:sldIdLst>
         </p14:section>
-        <p14:section name="S4 · 2.3 Danh mục (2)" id="{0afbe1f6-4f22-e931-7dab-657539a29f40}">
+        <p14:section name="S4 · 2.3 Danh mục (2)" id="{26370969-8fef-347c-61af-62674a81691f}">
           <p14:sldIdLst>
             <p14:sldId id="282"/>
             <p14:sldId id="283"/>
@@ -212,7 +212,7 @@
             <p14:sldId id="288"/>
           </p14:sldIdLst>
         </p14:section>
-        <p14:section name="S5 · Từ danh mục đến tổng quan tài liệu" id="{0e555abb-49d5-dd23-fa33-987e28e02a51}">
+        <p14:section name="S5 · Từ danh mục đến tổng quan tài liệu" id="{65eb2336-3c8a-668c-b2db-5f6e53d74e06}">
           <p14:sldIdLst>
             <p14:sldId id="289"/>
             <p14:sldId id="290"/>
@@ -226,14 +226,14 @@
             <p14:sldId id="298"/>
           </p14:sldIdLst>
         </p14:section>
-        <p14:section name="S6 · Thực hành nhóm" id="{5959b9c1-2155-d47a-46e8-74095fd40aaa}">
+        <p14:section name="S6 · Thực hành nhóm" id="{c996d3a3-d8ff-03d7-b4d3-a4873e5f1902}">
           <p14:sldIdLst>
             <p14:sldId id="299"/>
             <p14:sldId id="300"/>
             <p14:sldId id="301"/>
           </p14:sldIdLst>
         </p14:section>
-        <p14:section name="S7 · Kết buổi" id="{1319ac14-5e2d-0bd8-58aa-0441a62dd47b}">
+        <p14:section name="S7 · Kết buổi" id="{29e92ae7-f755-7ab8-f5c5-480715b5db1b}">
           <p14:sldIdLst>
             <p14:sldId id="302"/>
             <p14:sldId id="303"/>
@@ -7195,9 +7195,9 @@
             <a:tbl>
               <a:tblPr/>
               <a:tblGrid>
-                <a:gridCol w="3047196"/>
-                <a:gridCol w="4092852"/>
-                <a:gridCol w="3924191"/>
+                <a:gridCol w="3105449"/>
+                <a:gridCol w="4063113"/>
+                <a:gridCol w="3895678"/>
               </a:tblGrid>
               <a:tr h="524256">
                 <a:tc>
@@ -10098,8 +10098,8 @@
             <a:tbl>
               <a:tblPr/>
               <a:tblGrid>
-                <a:gridCol w="6067552"/>
-                <a:gridCol w="4996688"/>
+                <a:gridCol w="6118829"/>
+                <a:gridCol w="4945411"/>
               </a:tblGrid>
               <a:tr h="524256">
                 <a:tc>
@@ -21314,9 +21314,9 @@
             <a:tbl>
               <a:tblPr/>
               <a:tblGrid>
-                <a:gridCol w="3468303"/>
-                <a:gridCol w="3002048"/>
-                <a:gridCol w="4593889"/>
+                <a:gridCol w="3541965"/>
+                <a:gridCol w="2972936"/>
+                <a:gridCol w="4549339"/>
               </a:tblGrid>
               <a:tr h="524256">
                 <a:tc>
@@ -22594,9 +22594,9 @@
             <a:tbl>
               <a:tblPr/>
               <a:tblGrid>
-                <a:gridCol w="2793761"/>
-                <a:gridCol w="4138618"/>
-                <a:gridCol w="4131861"/>
+                <a:gridCol w="2861632"/>
+                <a:gridCol w="4104654"/>
+                <a:gridCol w="4097954"/>
               </a:tblGrid>
               <a:tr h="524256">
                 <a:tc>
@@ -24089,9 +24089,9 @@
             <a:tbl>
               <a:tblPr/>
               <a:tblGrid>
-                <a:gridCol w="2432746"/>
-                <a:gridCol w="4077341"/>
-                <a:gridCol w="4554152"/>
+                <a:gridCol w="2493638"/>
+                <a:gridCol w="4048577"/>
+                <a:gridCol w="4522024"/>
               </a:tblGrid>
               <a:tr h="524256">
                 <a:tc>
@@ -29363,10 +29363,10 @@
             <a:tbl>
               <a:tblPr/>
               <a:tblGrid>
-                <a:gridCol w="4069012"/>
-                <a:gridCol w="2331743"/>
-                <a:gridCol w="2331743"/>
-                <a:gridCol w="2331743"/>
+                <a:gridCol w="4134804"/>
+                <a:gridCol w="2309812"/>
+                <a:gridCol w="2309812"/>
+                <a:gridCol w="2309812"/>
               </a:tblGrid>
               <a:tr h="524256">
                 <a:tc>

--- a/mkt1107/output/MKT1107_W03_slides.pptx
+++ b/mkt1107/output/MKT1107_W03_slides.pptx
@@ -159,12 +159,12 @@
   <p:extLst>
     <p:ext uri="{521415D9-36F7-43E2-AB2F-B90AF26B5E84}">
       <p14:sectionLst xmlns:p14="http://schemas.microsoft.com/office/powerpoint/2010/main">
-        <p14:section name="Mở đầu" id="{64d14861-3353-3029-f1b5-7fcbfc37e305}">
+        <p14:section name="Mở đầu" id="{76a54743-6710-3204-69d0-1f5fbdfb71ee}">
           <p14:sldIdLst>
             <p14:sldId id="256"/>
           </p14:sldIdLst>
         </p14:section>
-        <p14:section name="S1 · Khởi động — kiểm tra bài tập Buổi 2" id="{594b0ba9-9dd4-c696-1b73-52ff9ec24db0}">
+        <p14:section name="S1 · Khởi động — kiểm tra bài tập Buổi 2" id="{3db5c4cf-68e1-e78a-0588-d7b1426b31a7}">
           <p14:sldIdLst>
             <p14:sldId id="257"/>
             <p14:sldId id="258"/>
@@ -172,7 +172,7 @@
             <p14:sldId id="260"/>
           </p14:sldIdLst>
         </p14:section>
-        <p14:section name="S2 · 2.2 Trích dẫn trong bài" id="{88ee72c9-7fe5-a7a6-2020-06d769811219}">
+        <p14:section name="S2 · 2.2 Trích dẫn trong bài" id="{9d278841-bb87-69cf-40bb-282a24fb4875}">
           <p14:sldIdLst>
             <p14:sldId id="261"/>
             <p14:sldId id="262"/>
@@ -189,7 +189,7 @@
             <p14:sldId id="273"/>
           </p14:sldIdLst>
         </p14:section>
-        <p14:section name="S3 · 2.3 Danh mục (1)" id="{462b20b9-71dc-e9af-c5e3-a4f8f3c888de}">
+        <p14:section name="S3 · 2.3 Danh mục (1)" id="{77ddd00d-64ac-7199-97b4-b14e9553676b}">
           <p14:sldIdLst>
             <p14:sldId id="274"/>
             <p14:sldId id="275"/>
@@ -201,7 +201,7 @@
             <p14:sldId id="281"/>
           </p14:sldIdLst>
         </p14:section>
-        <p14:section name="S4 · 2.3 Danh mục (2)" id="{26370969-8fef-347c-61af-62674a81691f}">
+        <p14:section name="S4 · 2.3 Danh mục (2)" id="{4bd4745a-b5a5-52af-e85c-ec8a65f98096}">
           <p14:sldIdLst>
             <p14:sldId id="282"/>
             <p14:sldId id="283"/>
@@ -212,7 +212,7 @@
             <p14:sldId id="288"/>
           </p14:sldIdLst>
         </p14:section>
-        <p14:section name="S5 · Từ danh mục đến tổng quan tài liệu" id="{65eb2336-3c8a-668c-b2db-5f6e53d74e06}">
+        <p14:section name="S5 · Từ danh mục đến tổng quan tài liệu" id="{5fed12fa-7da7-3176-124e-28505851924c}">
           <p14:sldIdLst>
             <p14:sldId id="289"/>
             <p14:sldId id="290"/>
@@ -226,14 +226,14 @@
             <p14:sldId id="298"/>
           </p14:sldIdLst>
         </p14:section>
-        <p14:section name="S6 · Thực hành nhóm" id="{c996d3a3-d8ff-03d7-b4d3-a4873e5f1902}">
+        <p14:section name="S6 · Thực hành nhóm" id="{0248111a-a50a-5440-3cc4-07459e3edd0f}">
           <p14:sldIdLst>
             <p14:sldId id="299"/>
             <p14:sldId id="300"/>
             <p14:sldId id="301"/>
           </p14:sldIdLst>
         </p14:section>
-        <p14:section name="S7 · Kết buổi" id="{29e92ae7-f755-7ab8-f5c5-480715b5db1b}">
+        <p14:section name="S7 · Kết buổi" id="{fe313d70-2c17-66b6-fd60-e889965cdff9}">
           <p14:sldIdLst>
             <p14:sldId id="302"/>
             <p14:sldId id="303"/>
@@ -1288,7 +1288,8 @@
           <a:p>
             <a:r>
               <a:rPr lang="en-US" dirty="0"/>
-              <a:t>Ba câu kiểm tra nhanh, tổng khoảng 3 phút. Mỗi câu: đọc to câu hỏi, cho 20 giây suy nghĩ, rồi đếm 3–2–1 để cả lớp cùng giơ 1, 2 hoặc 3 ngón theo phương án đúng. Giơ cùng lúc để không ai nhìn bạn bên cạnh.
+              <a:t>Thời gian: 20 giây suy nghĩ.
+Ba câu kiểm tra nhanh, tổng khoảng 3 phút. Mỗi câu: đọc to câu hỏi, cho 20 giây suy nghĩ, rồi đếm 3–2–1 để cả lớp cùng giơ 1, 2 hoặc 3 ngón theo phương án đúng. Giơ cùng lúc để không ai nhìn bạn bên cạnh.
 Câu 1: một bài báo tiếng Việt của ba tác giả Trần Thị Mai, Lê Văn Nam, Phạm Minh Tuấn, năm 2022. Trích trong ngoặc thế nào?
 Đáp án: 2 — (Trần và cộng sự, 2022). Ba lý do: trích bằng họ, không bằng tên (loại phương án 1); từ ba tác giả trở lên thì ngay từ lần đầu chỉ ghi tác giả đầu (loại phương án 3); tài liệu tiếng Việt dùng “và cộng sự”.
 Đây là câu ôn tập số 1 trong tài liệu học tập. Nếu nhiều bạn chọn sai, quay lại slide “Người Việt được trích bằng họ, không bằng tên” và nhắc quy tắc thêm một lần: danh mục xếp theo họ, nên người đọc tìm theo họ.
@@ -1564,7 +1565,8 @@
           <a:p>
             <a:r>
               <a:rPr lang="en-US" dirty="0"/>
-              <a:t>Phần 2.3 Danh mục tài liệu tham khảo, phần 1, khoảng 13 phút trước giải lao: một cấu trúc chung cho mọi loại tài liệu, chín nguyên tắc chung, rồi công thức và ví dụ cho sách, chương sách và bài báo khoa học có DOI.
+              <a:t>Thời gian: phút 35–48 của buổi học.
+Phần 2.3 Danh mục tài liệu tham khảo, phần 1, khoảng 13 phút trước giải lao: một cấu trúc chung cho mọi loại tài liệu, chín nguyên tắc chung, rồi công thức và ví dụ cho sách, chương sách và bài báo khoa học có DOI.
 Gợi ý cho sinh viên: mở danh mục của nhóm bên cạnh slide, vừa nghe vừa đánh dấu chỗ nghi sai — không cần sửa ngay, phần sửa có 12 phút riêng trong thực hành.
 Lưu ý cho giảng viên: phần này dựa trên slide UEF #7 (chỉ ô cuối), #10, #11, #12 — các slide #10, #11 đã sửa gạch nối số trang và in nghiêng số tập; slide #12 đánh số mục là “2.4” trong khi tài liệu học tập đánh số 2.3.1. Không chiếu slide UEF #4 (bài báo khoa học) vì ghi sai tên tác giả và DOI kiểu cũ.</a:t>
             </a:r>
@@ -1654,7 +1656,8 @@
           <a:p>
             <a:r>
               <a:rPr lang="en-US" dirty="0"/>
-              <a:t>Mười phút đầu là kiểm tra bài tập Buổi 2: danh mục từ 8 tài liệu trở lên và bảng tóm tắt (tác giả, năm, mục tiêu, phương pháp, kết quả). Bài tập này không chấm điểm riêng, nhưng là nguyên liệu trực tiếp cho M2 và cho phần thực hành 45 phút cuối buổi.
+              <a:t>Thời gian: phút 0–10 của buổi học.
+Mười phút đầu là kiểm tra bài tập Buổi 2: danh mục từ 8 tài liệu trở lên và bảng tóm tắt (tác giả, năm, mục tiêu, phương pháp, kết quả). Bài tập này không chấm điểm riêng, nhưng là nguyên liệu trực tiếp cho M2 và cho phần thực hành 45 phút cuối buổi.
 Cấu trúc phần khởi động: ba câu hỏi giơ tay (khoảng 3 phút), hai nhóm báo cáo mỗi nhóm một phút (khoảng 5 phút), rồi nối vào bài bằng một danh mục giả định (khoảng 2 phút).
 Nói với lớp: “Mình bắt đầu bằng việc nhìn lại xem các nhóm đang ở đâu. Không ai bị trừ điểm vì câu trả lời — mình cần số liệu thật để biết hôm nay nên nhấn vào chỗ nào.”
 Chuẩn bị: góc bảng để ghi số nhóm trả lời “có” cho từng câu hỏi; danh sách nhóm để chỉ định báo cáo.</a:t>
@@ -2301,7 +2304,8 @@
           <a:p>
             <a:r>
               <a:rPr lang="en-US" dirty="0"/>
-              <a:t>Giải lao 15 phút (phút 48–63). Điền giờ quay lại trước khi chiếu.
+              <a:t>Thời gian: giải lao 15 phút.
+Giải lao 15 phút (phút 48–63). Điền giờ quay lại trước khi chiếu.
 Báo trước nội dung sau giải lao: trang web, báo cáo, luận văn — và 10 lỗi APA hay gặp nhất.
 Nói trước khi nghỉ: “Trong giờ giải lao, nhóm nào muốn thì soát trước tên tác giả trong danh mục của mình — sau giải lao sẽ có bảng lỗi để đối chiếu.”
 Trong giờ nghỉ, giảng viên có thể đi qua vài bàn để xem nhanh danh mục, ghi chú các lỗi gặp nhiều để nêu ở phần bảng lỗi (không nêu tên nhóm).
@@ -2393,7 +2397,8 @@
           <a:p>
             <a:r>
               <a:rPr lang="en-US" dirty="0"/>
-              <a:t>Phần 2.3 Danh mục, phần 2, khoảng 15 phút: nguồn trực tuyến (trang web, báo điện tử), báo cáo tổ chức, luận văn, bài kỷ yếu, công cụ AI; tổng kết tên tác giả Việt Nam; bảng mười lỗi thường gặp; và một câu chốt về việc slide Bài 2 có một số cách ghi đã lỗi thời.
+              <a:t>Thời gian: phút 63–78 của buổi học.
+Phần 2.3 Danh mục, phần 2, khoảng 15 phút: nguồn trực tuyến (trang web, báo điện tử), báo cáo tổ chức, luận văn, bài kỷ yếu, công cụ AI; tổng kết tên tác giả Việt Nam; bảng mười lỗi thường gặp; và một câu chốt về việc slide Bài 2 có một số cách ghi đã lỗi thời.
 Nói với lớp: “Nửa này là phần các bạn sai nhiều nhất trong bài nộp — đặc biệt là tên tác giả Việt. Mình đi chậm hơn.”
 Nếu bị thiếu giờ: bài kỷ yếu và công cụ AI chỉ nêu công thức (đã có trong tài liệu học tập 2.3.2), dành thời gian cho tên tác giả Việt và bảng lỗi.
 Lưu ý cho giảng viên: phần này dựa trên slide UEF #5 (đã sửa: luận văn không ghi khoa và địa điểm; trang web không bắt buộc ngày truy cập).</a:t>
@@ -3135,7 +3140,8 @@
           <a:p>
             <a:r>
               <a:rPr lang="en-US" dirty="0"/>
-              <a:t>Phần này khoảng 15 phút và là phần quyết định chất lượng M2 — không cắt phần này dù bị thiếu giờ.
+              <a:t>Thời gian: phút 78–93 của buổi học.
+Phần này khoảng 15 phút và là phần quyết định chất lượng M2 — không cắt phần này dù bị thiếu giờ.
 Nội dung: tổng quan tài liệu là gì; tóm tắt khác tổng hợp (cùng ba nguồn, hai cách viết); ma trận tổng hợp từ bảng tóm tắt Buổi 2; cấu trúc ba phần của một bài tổng quan; văn phong học thuật; và từ mâu thuẫn, khoảng trống đến câu hỏi nghiên cứu.
 Nói với lớp: “Đến đây các bạn đã có danh mục đúng. Bây giờ mình biến danh mục và bảng tóm tắt đó thành một đoạn văn.”
 Lưu ý cho giảng viên: định nghĩa và quy trình trong phần này diễn giải từ video “Academic Writing for 2026: How to Link Literature to Research Questions” (qua NotebookLM); các nguồn “Nguồn A/B/C” và tình huống chuỗi trà sữa là giả định để minh họa, cần nói rõ với lớp.</a:t>
@@ -3684,7 +3690,8 @@
           <a:p>
             <a:r>
               <a:rPr lang="en-US" dirty="0"/>
-              <a:t>Chỉ định hai nhóm báo cáo, ưu tiên một nhóm đang làm tốt và một nhóm đang gặp khó, để lớp thấy cả hai phía. Mỗi nhóm một phút, nói theo đúng khung ba ý trên slide: đề tài là gì; một tài liệu tốt nhất nhóm đã tìm được và vì sao nhóm tin tài liệu đó; một khó khăn khi tìm tài liệu.
+              <a:t>Thời gian: mỗi nhóm đúng 1 phút.
+Chỉ định hai nhóm báo cáo, ưu tiên một nhóm đang làm tốt và một nhóm đang gặp khó, để lớp thấy cả hai phía. Mỗi nhóm một phút, nói theo đúng khung ba ý trên slide: đề tài là gì; một tài liệu tốt nhất nhóm đã tìm được và vì sao nhóm tin tài liệu đó; một khó khăn khi tìm tài liệu.
 Sau mỗi nhóm, giảng viên phản hồi đúng một câu — ví dụ khen tiêu chí đánh giá nguồn mà nhóm dùng, hoặc gợi ý một từ khóa tiếng Anh để tìm trên Google Scholar. Không giảng lại nội dung Buổi 2; nếu khó khăn của nhóm là “không tìm được bài báo khoa học”, chỉ nói: “Lát nữa ở phần thực hành, tôi sẽ đến bàn nhóm để tìm cùng.”
 Giữ đồng hồ chặt: tổng phần này khoảng 5 phút. Chuyển ý sang slide tiếp theo: “Giả sử một nhóm đã tìm đủ tài liệu. Bây giờ nhìn thử danh mục của họ.”</a:t>
             </a:r>
@@ -3958,7 +3965,8 @@
           <a:p>
             <a:r>
               <a:rPr lang="en-US" dirty="0"/>
-              <a:t>Hoạt động cá nhân 1 phút. Mỗi bạn viết lại câu trên slide thành một câu học thuật — chưa cần nguồn thật, ghi “(Nguồn ?, năm)” vào chỗ cần trích dẫn.
+              <a:t>Thời gian: 1 phút.
+Hoạt động cá nhân 1 phút. Mỗi bạn viết lại câu trên slide thành một câu học thuật — chưa cần nguồn thật, ghi “(Nguồn ?, năm)” vào chỗ cần trích dẫn.
 Hết 1 phút, chỉ định 2 bạn đọc to câu của mình. Điểm cần khen: bỏ “mình nghĩ”; bỏ “bây giờ” mơ hồ, thay bằng mốc thời gian hoặc bối cảnh cụ thể; có chỗ trích dẫn; dùng từ thận trọng như “ghi nhận”, “cho thấy” thay vì “chứng minh”. Một câu mẫu có thể gợi ý: “Một số nghiên cứu ghi nhận xu hướng ưa chuộng mỹ phẩm nội địa ở người tiêu dùng trẻ (Nguồn ?, năm).”
 Lỗi hiểu thường gặp cần nói sau khi nghe hai bạn: “Trích dẫn càng nhiều thì càng học thuật.” Không — trích dẫn cho mỗi khẳng định, không phải cho mỗi câu. Và tương quan không phải nhân quả: nghiên cứu khảo sát thường chỉ cho thấy hai yếu tố có liên hệ; không viết “TikTok làm sinh viên mua bốc đồng” nếu nguồn chỉ đo mối liên hệ.
 Thời gian cho văn phong học thuật cả hai slide: khoảng 3 phút.</a:t>
@@ -4141,7 +4149,8 @@
           <a:p>
             <a:r>
               <a:rPr lang="en-US" dirty="0"/>
-              <a:t>Thực hành nhóm “Xưởng tổng quan”, 45 phút. Sinh viên làm bản nháp của cả hai phần M2 — có giảng viên đi kèm và có một nhóm bạn kiểm tra giúp.
+              <a:t>Thời gian: phút 93–138 của buổi học.
+Thực hành nhóm “Xưởng tổng quan”, 45 phút. Sinh viên làm bản nháp của cả hai phần M2 — có giảng viên đi kèm và có một nhóm bạn kiểm tra giúp.
 Kịch bản mở đầu: “45 phút cuối các bạn làm đúng bài M2 — có tôi đi kèm. Bốn chặng trên màn hình: săn lỗi APA, sửa danh mục của nhóm, viết một đoạn tổng hợp từ ít nhất ba nguồn, rồi đổi bài cho nhóm bên cạnh kiểm tra. Mỗi chặng tôi sẽ báo giờ. Đoạn tổng hợp hôm nay chỉ cần một đoạn — nhưng là một đoạn tổng hợp, không phải ba câu tóm tắt nối nhau. Bắt đầu với phiếu săn lỗi.”
 Chuẩn bị: phiếu “Săn lỗi APA” (1 tờ/nhóm), phiếu nhóm và phiếu kiểm tra chéo đã in sẵn.
 Lưu ý cho giảng viên: kịch bản chi tiết trong phiếu hoạt động “Săn lỗi APA” và “Xưởng tổng quan”.</a:t>
@@ -4232,7 +4241,9 @@
           <a:p>
             <a:r>
               <a:rPr lang="en-US" dirty="0"/>
-              <a:t>Để slide này trên màn hình suốt 45 phút; báo giờ ở cuối mỗi chặng.
+              <a:t>Thời gian: 45 phút.
+Phân bổ thời gian — chặng 1: 10 phút; chặng 2: 12 phút; chặng 3: 15 phút; chặng 4: 8 phút.
+Để slide này trên màn hình suốt 45 phút; báo giờ ở cuối mỗi chặng.
 Chặng 1 (phút 93–103): săn lỗi APA theo phiếu 10 mục, chữa nhanh 3 mục sai nhiều nhất.
 Chặng 2 (103–115): báo chuyển, nhắc “soát tên tác giả trước tiên”. Đi các bàn, ưu tiên tên tác giả Việt và DOI; hỏi “tài liệu nào chưa đọc?”. Mục thiếu thông tin thì đánh dấu “cần tra lại”, không tự đoán.
 Chặng 3 (115–130): chiếu lại slide bốn dấu hiệu tổng hợp trong 30 giây. Đi các bàn đọc câu đầu của từng nhóm — câu bắt đầu bằng tên tác giả thì gợi ý viết lại; ghi chú 2 đoạn tốt để khen cuối giờ. Nhóm không tìm ra khoảng trống: gợi ý bốn kiểu (đối tượng, bối cảnh, thời điểm, kết quả mâu thuẫn).
@@ -4419,7 +4430,8 @@
           <a:p>
             <a:r>
               <a:rPr lang="en-US" dirty="0"/>
-              <a:t>Kết buổi khoảng 8 phút: phiếu ra về 3 phút, nhắc M2 và danh sách tự kiểm tra 4 phút, nối sang Buổi 4 một phút.
+              <a:t>Thời gian: phút 138–146 của buổi học.
+Kết buổi khoảng 8 phút: phiếu ra về 3 phút, nhắc M2 và danh sách tự kiểm tra 4 phút, nối sang Buổi 4 một phút.
 Nói: “Các nhóm lưu lại danh mục đã sửa, đoạn tổng hợp và phiếu kiểm tra chéo nhóm bạn đã chấm cho mình — đó là bản nháp của M2.”
 Phát giấy nhỏ cho phiếu ra về trong lúc chuyển slide. Còn khoảng 4 phút dự phòng cuối buổi (146–150).
 Nếu phần thực hành kéo dài, giữ nguyên phiếu ra về và lời nhắc M2 — đây là phần không cắt; có thể rút ngắn phần đọc danh sách tự kiểm tra vì danh sách đã có trong tài liệu đọc thêm.</a:t>
@@ -5141,7 +5153,8 @@
           <a:p>
             <a:r>
               <a:rPr lang="en-US" dirty="0"/>
-              <a:t>Phần 2.2 kéo dài khoảng 25 phút: nguyên tắc tác giả – năm; số lượng tác giả; tên người Việt; tác giả là tổ chức; trích nguyên văn và diễn giải; trích qua tác giả trung gian; các trường hợp đặc biệt; và một vòng kiểm tra nhanh 3 phút ở cuối.
+              <a:t>Thời gian: phút 10–35 của buổi học.
+Phần 2.2 kéo dài khoảng 25 phút: nguyên tắc tác giả – năm; số lượng tác giả; tên người Việt; tác giả là tổ chức; trích nguyên văn và diễn giải; trích qua tác giả trung gian; các trường hợp đặc biệt; và một vòng kiểm tra nhanh 3 phút ở cuối.
 Nói với lớp: “Phần này các bạn nên ghi chép theo bảng — các quy tắc sẽ dùng ngay trong 45 phút thực hành cuối buổi.”
 Lưu ý cho giảng viên: phần này dựa trên slide UEF Bài 2 #3, #6, #8, #9 nhưng các slide #3, #6, #8 đã được tạo lại theo tài liệu học tập vì có lỗi (đưa ba lựa chọn trích tên người Việt, thiếu năm của tài liệu gốc khi trích qua trung gian, dùng “nnk.” thay cho “và cộng sự”). Nếu bị thiếu giờ, các trường hợp “cùng tác giả cùng năm”, “trùng họ”, “công cụ AI” chỉ chiếu bảng và chuyển sang tài liệu đọc thêm.</a:t>
             </a:r>
@@ -5556,8 +5569,8 @@
         </p:nvSpPr>
         <p:spPr>
           <a:xfrm>
-            <a:off x="3840480" y="2103120"/>
-            <a:ext cx="6766560" cy="2194560"/>
+            <a:off x="3840480" y="2240280"/>
+            <a:ext cx="6766560" cy="2377440"/>
           </a:xfrm>
           <a:prstGeom prst="rect">
             <a:avLst/>
@@ -12393,7 +12406,7 @@
                 <a:ea typeface="Alexandria" pitchFamily="34" charset="-122"/>
                 <a:cs typeface="Alexandria" pitchFamily="34" charset="-120"/>
               </a:rPr>
-              <a:t>20 giây suy nghĩ — đếm 3–2–1, cả lớp giơ 1, 2 hoặc 3 ngón</a:t>
+              <a:t>Suy nghĩ nhanh — đếm 3–2–1, cả lớp giơ 1, 2 hoặc 3 ngón</a:t>
             </a:r>
             <a:endParaRPr lang="en-US" sz="2600" dirty="0"/>
           </a:p>
@@ -13813,49 +13826,7 @@
       </p:sp>
       <p:sp>
         <p:nvSpPr>
-          <p:cNvPr id="8" name="Text 6"/>
-          <p:cNvSpPr txBox="1"/>
-          <p:nvPr/>
-        </p:nvSpPr>
-        <p:spPr>
-          <a:xfrm>
-            <a:off x="3840480" y="1417320"/>
-            <a:ext cx="6766560" cy="594360"/>
-          </a:xfrm>
-          <a:prstGeom prst="rect">
-            <a:avLst/>
-          </a:prstGeom>
-          <a:noFill/>
-          <a:ln/>
-        </p:spPr>
-        <p:txBody>
-          <a:bodyPr wrap="square" lIns="76200" tIns="76200" rIns="76200" bIns="76200" rtlCol="0" anchor="t"/>
-          <a:lstStyle/>
-          <a:p>
-            <a:pPr algn="l" indent="0" marL="0">
-              <a:lnSpc>
-                <a:spcPts val="3600"/>
-              </a:lnSpc>
-              <a:buNone/>
-            </a:pPr>
-            <a:r>
-              <a:rPr lang="en-US" sz="2800" b="1" dirty="0">
-                <a:solidFill>
-                  <a:srgbClr val="962B7C"/>
-                </a:solidFill>
-                <a:latin typeface="Alexandria" pitchFamily="34" charset="0"/>
-                <a:ea typeface="Alexandria" pitchFamily="34" charset="-122"/>
-                <a:cs typeface="Alexandria" pitchFamily="34" charset="-120"/>
-              </a:rPr>
-              <a:t>35–48 phút</a:t>
-            </a:r>
-            <a:endParaRPr lang="en-US" sz="2800" dirty="0"/>
-          </a:p>
-        </p:txBody>
-      </p:sp>
-      <p:sp>
-        <p:nvSpPr>
-          <p:cNvPr id="9" name="Text 0"/>
+          <p:cNvPr id="8" name="Text 0"/>
           <p:cNvSpPr/>
           <p:nvPr>
             <p:ph idx="100" type="title" hasCustomPrompt="1"/>
@@ -13863,8 +13834,8 @@
         </p:nvSpPr>
         <p:spPr>
           <a:xfrm>
-            <a:off x="3840480" y="2103120"/>
-            <a:ext cx="6766560" cy="2194560"/>
+            <a:off x="3840480" y="2240280"/>
+            <a:ext cx="6766560" cy="2377440"/>
           </a:xfrm>
           <a:prstGeom prst="rect">
             <a:avLst/>
@@ -13873,7 +13844,7 @@
           <a:ln/>
         </p:spPr>
         <p:txBody>
-          <a:bodyPr wrap="square" lIns="76200" tIns="76200" rIns="76200" bIns="76200" rtlCol="0" anchor="t"/>
+          <a:bodyPr wrap="square" lIns="76200" tIns="76200" rIns="76200" bIns="76200" rtlCol="0" anchor="ctr"/>
           <a:lstStyle/>
           <a:p>
             <a:pPr algn="l" indent="0" marL="0">
@@ -14108,49 +14079,7 @@
       </p:sp>
       <p:sp>
         <p:nvSpPr>
-          <p:cNvPr id="8" name="Text 6"/>
-          <p:cNvSpPr txBox="1"/>
-          <p:nvPr/>
-        </p:nvSpPr>
-        <p:spPr>
-          <a:xfrm>
-            <a:off x="3840480" y="1417320"/>
-            <a:ext cx="6766560" cy="594360"/>
-          </a:xfrm>
-          <a:prstGeom prst="rect">
-            <a:avLst/>
-          </a:prstGeom>
-          <a:noFill/>
-          <a:ln/>
-        </p:spPr>
-        <p:txBody>
-          <a:bodyPr wrap="square" lIns="76200" tIns="76200" rIns="76200" bIns="76200" rtlCol="0" anchor="t"/>
-          <a:lstStyle/>
-          <a:p>
-            <a:pPr algn="l" indent="0" marL="0">
-              <a:lnSpc>
-                <a:spcPts val="3600"/>
-              </a:lnSpc>
-              <a:buNone/>
-            </a:pPr>
-            <a:r>
-              <a:rPr lang="en-US" sz="2800" b="1" dirty="0">
-                <a:solidFill>
-                  <a:srgbClr val="962B7C"/>
-                </a:solidFill>
-                <a:latin typeface="Alexandria" pitchFamily="34" charset="0"/>
-                <a:ea typeface="Alexandria" pitchFamily="34" charset="-122"/>
-                <a:cs typeface="Alexandria" pitchFamily="34" charset="-120"/>
-              </a:rPr>
-              <a:t>0–10 phút</a:t>
-            </a:r>
-            <a:endParaRPr lang="en-US" sz="2800" dirty="0"/>
-          </a:p>
-        </p:txBody>
-      </p:sp>
-      <p:sp>
-        <p:nvSpPr>
-          <p:cNvPr id="9" name="Text 0"/>
+          <p:cNvPr id="8" name="Text 0"/>
           <p:cNvSpPr/>
           <p:nvPr>
             <p:ph idx="100" type="title" hasCustomPrompt="1"/>
@@ -14158,8 +14087,8 @@
         </p:nvSpPr>
         <p:spPr>
           <a:xfrm>
-            <a:off x="3840480" y="2103120"/>
-            <a:ext cx="6766560" cy="2194560"/>
+            <a:off x="3840480" y="2240280"/>
+            <a:ext cx="6766560" cy="2377440"/>
           </a:xfrm>
           <a:prstGeom prst="rect">
             <a:avLst/>
@@ -14168,7 +14097,7 @@
           <a:ln/>
         </p:spPr>
         <p:txBody>
-          <a:bodyPr wrap="square" lIns="76200" tIns="76200" rIns="76200" bIns="76200" rtlCol="0" anchor="t"/>
+          <a:bodyPr wrap="square" lIns="76200" tIns="76200" rIns="76200" bIns="76200" rtlCol="0" anchor="ctr"/>
           <a:lstStyle/>
           <a:p>
             <a:pPr algn="l" indent="0" marL="0">
@@ -18757,7 +18686,7 @@
                 <a:ea typeface="Alexandria" pitchFamily="34" charset="-122"/>
                 <a:cs typeface="Alexandria" pitchFamily="34" charset="-120"/>
               </a:rPr>
-              <a:t>15'</a:t>
+              <a:t>Nghỉ</a:t>
             </a:r>
             <a:endParaRPr lang="en-US" sz="9600" dirty="0"/>
           </a:p>
@@ -18799,7 +18728,7 @@
                 <a:ea typeface="Alexandria" pitchFamily="34" charset="-122"/>
                 <a:cs typeface="Alexandria" pitchFamily="34" charset="-120"/>
               </a:rPr>
-              <a:t>Giải lao 15 phút</a:t>
+              <a:t>Giải lao</a:t>
             </a:r>
             <a:endParaRPr lang="en-US" sz="4800" dirty="0"/>
           </a:p>
@@ -19061,49 +18990,7 @@
       </p:sp>
       <p:sp>
         <p:nvSpPr>
-          <p:cNvPr id="8" name="Text 6"/>
-          <p:cNvSpPr txBox="1"/>
-          <p:nvPr/>
-        </p:nvSpPr>
-        <p:spPr>
-          <a:xfrm>
-            <a:off x="3840480" y="1417320"/>
-            <a:ext cx="6766560" cy="594360"/>
-          </a:xfrm>
-          <a:prstGeom prst="rect">
-            <a:avLst/>
-          </a:prstGeom>
-          <a:noFill/>
-          <a:ln/>
-        </p:spPr>
-        <p:txBody>
-          <a:bodyPr wrap="square" lIns="76200" tIns="76200" rIns="76200" bIns="76200" rtlCol="0" anchor="t"/>
-          <a:lstStyle/>
-          <a:p>
-            <a:pPr algn="l" indent="0" marL="0">
-              <a:lnSpc>
-                <a:spcPts val="3600"/>
-              </a:lnSpc>
-              <a:buNone/>
-            </a:pPr>
-            <a:r>
-              <a:rPr lang="en-US" sz="2800" b="1" dirty="0">
-                <a:solidFill>
-                  <a:srgbClr val="962B7C"/>
-                </a:solidFill>
-                <a:latin typeface="Alexandria" pitchFamily="34" charset="0"/>
-                <a:ea typeface="Alexandria" pitchFamily="34" charset="-122"/>
-                <a:cs typeface="Alexandria" pitchFamily="34" charset="-120"/>
-              </a:rPr>
-              <a:t>63–78 phút</a:t>
-            </a:r>
-            <a:endParaRPr lang="en-US" sz="2800" dirty="0"/>
-          </a:p>
-        </p:txBody>
-      </p:sp>
-      <p:sp>
-        <p:nvSpPr>
-          <p:cNvPr id="9" name="Text 0"/>
+          <p:cNvPr id="8" name="Text 0"/>
           <p:cNvSpPr/>
           <p:nvPr>
             <p:ph idx="100" type="title" hasCustomPrompt="1"/>
@@ -19111,8 +18998,8 @@
         </p:nvSpPr>
         <p:spPr>
           <a:xfrm>
-            <a:off x="3840480" y="2103120"/>
-            <a:ext cx="6766560" cy="2194560"/>
+            <a:off x="3840480" y="2240280"/>
+            <a:ext cx="6766560" cy="2377440"/>
           </a:xfrm>
           <a:prstGeom prst="rect">
             <a:avLst/>
@@ -19121,7 +19008,7 @@
           <a:ln/>
         </p:spPr>
         <p:txBody>
-          <a:bodyPr wrap="square" lIns="76200" tIns="76200" rIns="76200" bIns="76200" rtlCol="0" anchor="t"/>
+          <a:bodyPr wrap="square" lIns="76200" tIns="76200" rIns="76200" bIns="76200" rtlCol="0" anchor="ctr"/>
           <a:lstStyle/>
           <a:p>
             <a:pPr algn="l" indent="0" marL="0">
@@ -26393,49 +26280,7 @@
       </p:sp>
       <p:sp>
         <p:nvSpPr>
-          <p:cNvPr id="8" name="Text 6"/>
-          <p:cNvSpPr txBox="1"/>
-          <p:nvPr/>
-        </p:nvSpPr>
-        <p:spPr>
-          <a:xfrm>
-            <a:off x="3840480" y="1417320"/>
-            <a:ext cx="6766560" cy="594360"/>
-          </a:xfrm>
-          <a:prstGeom prst="rect">
-            <a:avLst/>
-          </a:prstGeom>
-          <a:noFill/>
-          <a:ln/>
-        </p:spPr>
-        <p:txBody>
-          <a:bodyPr wrap="square" lIns="76200" tIns="76200" rIns="76200" bIns="76200" rtlCol="0" anchor="t"/>
-          <a:lstStyle/>
-          <a:p>
-            <a:pPr algn="l" indent="0" marL="0">
-              <a:lnSpc>
-                <a:spcPts val="3600"/>
-              </a:lnSpc>
-              <a:buNone/>
-            </a:pPr>
-            <a:r>
-              <a:rPr lang="en-US" sz="2800" b="1" dirty="0">
-                <a:solidFill>
-                  <a:srgbClr val="962B7C"/>
-                </a:solidFill>
-                <a:latin typeface="Alexandria" pitchFamily="34" charset="0"/>
-                <a:ea typeface="Alexandria" pitchFamily="34" charset="-122"/>
-                <a:cs typeface="Alexandria" pitchFamily="34" charset="-120"/>
-              </a:rPr>
-              <a:t>78–93 phút</a:t>
-            </a:r>
-            <a:endParaRPr lang="en-US" sz="2800" dirty="0"/>
-          </a:p>
-        </p:txBody>
-      </p:sp>
-      <p:sp>
-        <p:nvSpPr>
-          <p:cNvPr id="9" name="Text 0"/>
+          <p:cNvPr id="8" name="Text 0"/>
           <p:cNvSpPr/>
           <p:nvPr>
             <p:ph idx="100" type="title" hasCustomPrompt="1"/>
@@ -26443,8 +26288,8 @@
         </p:nvSpPr>
         <p:spPr>
           <a:xfrm>
-            <a:off x="3840480" y="2103120"/>
-            <a:ext cx="6766560" cy="2194560"/>
+            <a:off x="3840480" y="2240280"/>
+            <a:ext cx="6766560" cy="2377440"/>
           </a:xfrm>
           <a:prstGeom prst="rect">
             <a:avLst/>
@@ -26453,7 +26298,7 @@
           <a:ln/>
         </p:spPr>
         <p:txBody>
-          <a:bodyPr wrap="square" lIns="76200" tIns="76200" rIns="76200" bIns="76200" rtlCol="0" anchor="t"/>
+          <a:bodyPr wrap="square" lIns="76200" tIns="76200" rIns="76200" bIns="76200" rtlCol="0" anchor="ctr"/>
           <a:lstStyle/>
           <a:p>
             <a:pPr algn="l" indent="0" marL="0">
@@ -30799,7 +30644,7 @@
               <a:buNone/>
             </a:pPr>
             <a:r>
-              <a:rPr lang="en-US" sz="3600" b="1" dirty="0">
+              <a:rPr lang="en-US" sz="3400" b="1" dirty="0">
                 <a:solidFill>
                   <a:srgbClr val="2E2A3A"/>
                 </a:solidFill>
@@ -30807,9 +30652,9 @@
                 <a:ea typeface="Alexandria" pitchFamily="34" charset="-122"/>
                 <a:cs typeface="Alexandria" pitchFamily="34" charset="-120"/>
               </a:rPr>
-              <a:t>Hai nhóm, mỗi nhóm một phút</a:t>
-            </a:r>
-            <a:endParaRPr lang="en-US" sz="3600" dirty="0"/>
+              <a:t>Hai nhóm chia sẻ: đề tài, tài liệu tốt nhất, một khó khăn</a:t>
+            </a:r>
+            <a:endParaRPr lang="en-US" sz="3400" dirty="0"/>
           </a:p>
         </p:txBody>
       </p:sp>
@@ -31473,7 +31318,7 @@
                 <a:ea typeface="Alexandria" pitchFamily="34" charset="-122"/>
                 <a:cs typeface="Alexandria" pitchFamily="34" charset="-120"/>
               </a:rPr>
-              <a:t>Mỗi nhóm đúng một phút — giảng viên phản hồi một câu</a:t>
+              <a:t>Mỗi nhóm trình bày ngắn — giảng viên phản hồi một câu</a:t>
             </a:r>
             <a:endParaRPr lang="en-US" sz="2600" dirty="0"/>
           </a:p>
@@ -32983,7 +32828,7 @@
               <a:buNone/>
             </a:pPr>
             <a:r>
-              <a:rPr lang="en-US" sz="3500" b="1" dirty="0">
+              <a:rPr lang="en-US" sz="3600" b="1" dirty="0">
                 <a:solidFill>
                   <a:srgbClr val="2E2A3A"/>
                 </a:solidFill>
@@ -32991,9 +32836,9 @@
                 <a:ea typeface="Alexandria" pitchFamily="34" charset="-122"/>
                 <a:cs typeface="Alexandria" pitchFamily="34" charset="-120"/>
               </a:rPr>
-              <a:t>Một phút: viết lại câu này thành câu học thuật</a:t>
-            </a:r>
-            <a:endParaRPr lang="en-US" sz="3500" dirty="0"/>
+              <a:t>Thử: viết lại câu này thành câu học thuật</a:t>
+            </a:r>
+            <a:endParaRPr lang="en-US" sz="3600" dirty="0"/>
           </a:p>
         </p:txBody>
       </p:sp>
@@ -34216,49 +34061,7 @@
       </p:sp>
       <p:sp>
         <p:nvSpPr>
-          <p:cNvPr id="8" name="Text 6"/>
-          <p:cNvSpPr txBox="1"/>
-          <p:nvPr/>
-        </p:nvSpPr>
-        <p:spPr>
-          <a:xfrm>
-            <a:off x="3840480" y="1417320"/>
-            <a:ext cx="6766560" cy="594360"/>
-          </a:xfrm>
-          <a:prstGeom prst="rect">
-            <a:avLst/>
-          </a:prstGeom>
-          <a:noFill/>
-          <a:ln/>
-        </p:spPr>
-        <p:txBody>
-          <a:bodyPr wrap="square" lIns="76200" tIns="76200" rIns="76200" bIns="76200" rtlCol="0" anchor="t"/>
-          <a:lstStyle/>
-          <a:p>
-            <a:pPr algn="l" indent="0" marL="0">
-              <a:lnSpc>
-                <a:spcPts val="3600"/>
-              </a:lnSpc>
-              <a:buNone/>
-            </a:pPr>
-            <a:r>
-              <a:rPr lang="en-US" sz="2800" b="1" dirty="0">
-                <a:solidFill>
-                  <a:srgbClr val="962B7C"/>
-                </a:solidFill>
-                <a:latin typeface="Alexandria" pitchFamily="34" charset="0"/>
-                <a:ea typeface="Alexandria" pitchFamily="34" charset="-122"/>
-                <a:cs typeface="Alexandria" pitchFamily="34" charset="-120"/>
-              </a:rPr>
-              <a:t>93–138 phút</a:t>
-            </a:r>
-            <a:endParaRPr lang="en-US" sz="2800" dirty="0"/>
-          </a:p>
-        </p:txBody>
-      </p:sp>
-      <p:sp>
-        <p:nvSpPr>
-          <p:cNvPr id="9" name="Text 0"/>
+          <p:cNvPr id="8" name="Text 0"/>
           <p:cNvSpPr/>
           <p:nvPr>
             <p:ph idx="100" type="title" hasCustomPrompt="1"/>
@@ -34266,8 +34069,8 @@
         </p:nvSpPr>
         <p:spPr>
           <a:xfrm>
-            <a:off x="3840480" y="2103120"/>
-            <a:ext cx="6766560" cy="2194560"/>
+            <a:off x="3840480" y="2240280"/>
+            <a:ext cx="6766560" cy="2377440"/>
           </a:xfrm>
           <a:prstGeom prst="rect">
             <a:avLst/>
@@ -34276,7 +34079,7 @@
           <a:ln/>
         </p:spPr>
         <p:txBody>
-          <a:bodyPr wrap="square" lIns="76200" tIns="76200" rIns="76200" bIns="76200" rtlCol="0" anchor="t"/>
+          <a:bodyPr wrap="square" lIns="76200" tIns="76200" rIns="76200" bIns="76200" rtlCol="0" anchor="ctr"/>
           <a:lstStyle/>
           <a:p>
             <a:pPr algn="l" indent="0" marL="0">
@@ -34465,7 +34268,7 @@
                 <a:ea typeface="Alexandria" pitchFamily="34" charset="-122"/>
                 <a:cs typeface="Alexandria" pitchFamily="34" charset="-120"/>
               </a:rPr>
-              <a:t>Xưởng tổng quan (45'): sửa danh mục, viết một đoạn tổng hợp, để nhóm bạn kiểm tra</a:t>
+              <a:t>Xưởng tổng quan: sửa danh mục, viết một đoạn tổng hợp, để nhóm bạn kiểm tra</a:t>
             </a:r>
             <a:endParaRPr lang="en-US" sz="3400" dirty="0"/>
           </a:p>
@@ -34502,7 +34305,7 @@
         <p:spPr>
           <a:xfrm>
             <a:off x="640080" y="1828800"/>
-            <a:ext cx="1280160" cy="548640"/>
+            <a:ext cx="731520" cy="548640"/>
           </a:xfrm>
           <a:prstGeom prst="roundRect">
             <a:avLst>
@@ -34524,7 +34327,7 @@
         <p:spPr>
           <a:xfrm>
             <a:off x="640080" y="1828800"/>
-            <a:ext cx="1280160" cy="548640"/>
+            <a:ext cx="731520" cy="548640"/>
           </a:xfrm>
           <a:prstGeom prst="rect">
             <a:avLst/>
@@ -34551,7 +34354,7 @@
                 <a:ea typeface="Alexandria" pitchFamily="34" charset="-122"/>
                 <a:cs typeface="Alexandria" pitchFamily="34" charset="-120"/>
               </a:rPr>
-              <a:t>10'</a:t>
+              <a:t>1</a:t>
             </a:r>
             <a:endParaRPr lang="en-US" sz="2400" dirty="0"/>
           </a:p>
@@ -34565,8 +34368,8 @@
         </p:nvSpPr>
         <p:spPr>
           <a:xfrm>
-            <a:off x="2103120" y="1783080"/>
-            <a:ext cx="9372600" cy="640080"/>
+            <a:off x="1554480" y="1783080"/>
+            <a:ext cx="9921240" cy="640080"/>
           </a:xfrm>
           <a:prstGeom prst="rect">
             <a:avLst/>
@@ -34647,7 +34450,7 @@
         <p:spPr>
           <a:xfrm>
             <a:off x="640080" y="2606040"/>
-            <a:ext cx="1280160" cy="548640"/>
+            <a:ext cx="731520" cy="548640"/>
           </a:xfrm>
           <a:prstGeom prst="roundRect">
             <a:avLst>
@@ -34669,7 +34472,7 @@
         <p:spPr>
           <a:xfrm>
             <a:off x="640080" y="2606040"/>
-            <a:ext cx="1280160" cy="548640"/>
+            <a:ext cx="731520" cy="548640"/>
           </a:xfrm>
           <a:prstGeom prst="rect">
             <a:avLst/>
@@ -34696,7 +34499,7 @@
                 <a:ea typeface="Alexandria" pitchFamily="34" charset="-122"/>
                 <a:cs typeface="Alexandria" pitchFamily="34" charset="-120"/>
               </a:rPr>
-              <a:t>12'</a:t>
+              <a:t>2</a:t>
             </a:r>
             <a:endParaRPr lang="en-US" sz="2400" dirty="0"/>
           </a:p>
@@ -34710,8 +34513,8 @@
         </p:nvSpPr>
         <p:spPr>
           <a:xfrm>
-            <a:off x="2103120" y="2560320"/>
-            <a:ext cx="9372600" cy="640080"/>
+            <a:off x="1554480" y="2560320"/>
+            <a:ext cx="9921240" cy="640080"/>
           </a:xfrm>
           <a:prstGeom prst="rect">
             <a:avLst/>
@@ -34792,7 +34595,7 @@
         <p:spPr>
           <a:xfrm>
             <a:off x="640080" y="3383280"/>
-            <a:ext cx="1280160" cy="548640"/>
+            <a:ext cx="731520" cy="548640"/>
           </a:xfrm>
           <a:prstGeom prst="roundRect">
             <a:avLst>
@@ -34814,7 +34617,7 @@
         <p:spPr>
           <a:xfrm>
             <a:off x="640080" y="3383280"/>
-            <a:ext cx="1280160" cy="548640"/>
+            <a:ext cx="731520" cy="548640"/>
           </a:xfrm>
           <a:prstGeom prst="rect">
             <a:avLst/>
@@ -34841,7 +34644,7 @@
                 <a:ea typeface="Alexandria" pitchFamily="34" charset="-122"/>
                 <a:cs typeface="Alexandria" pitchFamily="34" charset="-120"/>
               </a:rPr>
-              <a:t>15'</a:t>
+              <a:t>3</a:t>
             </a:r>
             <a:endParaRPr lang="en-US" sz="2400" dirty="0"/>
           </a:p>
@@ -34855,8 +34658,8 @@
         </p:nvSpPr>
         <p:spPr>
           <a:xfrm>
-            <a:off x="2103120" y="3337560"/>
-            <a:ext cx="9372600" cy="640080"/>
+            <a:off x="1554480" y="3337560"/>
+            <a:ext cx="9921240" cy="640080"/>
           </a:xfrm>
           <a:prstGeom prst="rect">
             <a:avLst/>
@@ -34937,7 +34740,7 @@
         <p:spPr>
           <a:xfrm>
             <a:off x="640080" y="4160520"/>
-            <a:ext cx="1280160" cy="548640"/>
+            <a:ext cx="731520" cy="548640"/>
           </a:xfrm>
           <a:prstGeom prst="roundRect">
             <a:avLst>
@@ -34959,7 +34762,7 @@
         <p:spPr>
           <a:xfrm>
             <a:off x="640080" y="4160520"/>
-            <a:ext cx="1280160" cy="548640"/>
+            <a:ext cx="731520" cy="548640"/>
           </a:xfrm>
           <a:prstGeom prst="rect">
             <a:avLst/>
@@ -34986,7 +34789,7 @@
                 <a:ea typeface="Alexandria" pitchFamily="34" charset="-122"/>
                 <a:cs typeface="Alexandria" pitchFamily="34" charset="-120"/>
               </a:rPr>
-              <a:t>8'</a:t>
+              <a:t>4</a:t>
             </a:r>
             <a:endParaRPr lang="en-US" sz="2400" dirty="0"/>
           </a:p>
@@ -35000,8 +34803,8 @@
         </p:nvSpPr>
         <p:spPr>
           <a:xfrm>
-            <a:off x="2103120" y="4114800"/>
-            <a:ext cx="9372600" cy="640080"/>
+            <a:off x="1554480" y="4114800"/>
+            <a:ext cx="9921240" cy="640080"/>
           </a:xfrm>
           <a:prstGeom prst="rect">
             <a:avLst/>
@@ -36247,49 +36050,7 @@
       </p:sp>
       <p:sp>
         <p:nvSpPr>
-          <p:cNvPr id="8" name="Text 6"/>
-          <p:cNvSpPr txBox="1"/>
-          <p:nvPr/>
-        </p:nvSpPr>
-        <p:spPr>
-          <a:xfrm>
-            <a:off x="3840480" y="1417320"/>
-            <a:ext cx="6766560" cy="594360"/>
-          </a:xfrm>
-          <a:prstGeom prst="rect">
-            <a:avLst/>
-          </a:prstGeom>
-          <a:noFill/>
-          <a:ln/>
-        </p:spPr>
-        <p:txBody>
-          <a:bodyPr wrap="square" lIns="76200" tIns="76200" rIns="76200" bIns="76200" rtlCol="0" anchor="t"/>
-          <a:lstStyle/>
-          <a:p>
-            <a:pPr algn="l" indent="0" marL="0">
-              <a:lnSpc>
-                <a:spcPts val="3600"/>
-              </a:lnSpc>
-              <a:buNone/>
-            </a:pPr>
-            <a:r>
-              <a:rPr lang="en-US" sz="2800" b="1" dirty="0">
-                <a:solidFill>
-                  <a:srgbClr val="962B7C"/>
-                </a:solidFill>
-                <a:latin typeface="Alexandria" pitchFamily="34" charset="0"/>
-                <a:ea typeface="Alexandria" pitchFamily="34" charset="-122"/>
-                <a:cs typeface="Alexandria" pitchFamily="34" charset="-120"/>
-              </a:rPr>
-              <a:t>138–146 phút</a:t>
-            </a:r>
-            <a:endParaRPr lang="en-US" sz="2800" dirty="0"/>
-          </a:p>
-        </p:txBody>
-      </p:sp>
-      <p:sp>
-        <p:nvSpPr>
-          <p:cNvPr id="9" name="Text 0"/>
+          <p:cNvPr id="8" name="Text 0"/>
           <p:cNvSpPr/>
           <p:nvPr>
             <p:ph idx="100" type="title" hasCustomPrompt="1"/>
@@ -36297,8 +36058,8 @@
         </p:nvSpPr>
         <p:spPr>
           <a:xfrm>
-            <a:off x="3840480" y="2103120"/>
-            <a:ext cx="6766560" cy="2194560"/>
+            <a:off x="3840480" y="2240280"/>
+            <a:ext cx="6766560" cy="2377440"/>
           </a:xfrm>
           <a:prstGeom prst="rect">
             <a:avLst/>
@@ -36307,7 +36068,7 @@
           <a:ln/>
         </p:spPr>
         <p:txBody>
-          <a:bodyPr wrap="square" lIns="76200" tIns="76200" rIns="76200" bIns="76200" rtlCol="0" anchor="t"/>
+          <a:bodyPr wrap="square" lIns="76200" tIns="76200" rIns="76200" bIns="76200" rtlCol="0" anchor="ctr"/>
           <a:lstStyle/>
           <a:p>
             <a:pPr algn="l" indent="0" marL="0">
@@ -40782,49 +40543,7 @@
       </p:sp>
       <p:sp>
         <p:nvSpPr>
-          <p:cNvPr id="8" name="Text 6"/>
-          <p:cNvSpPr txBox="1"/>
-          <p:nvPr/>
-        </p:nvSpPr>
-        <p:spPr>
-          <a:xfrm>
-            <a:off x="3840480" y="1417320"/>
-            <a:ext cx="6766560" cy="594360"/>
-          </a:xfrm>
-          <a:prstGeom prst="rect">
-            <a:avLst/>
-          </a:prstGeom>
-          <a:noFill/>
-          <a:ln/>
-        </p:spPr>
-        <p:txBody>
-          <a:bodyPr wrap="square" lIns="76200" tIns="76200" rIns="76200" bIns="76200" rtlCol="0" anchor="t"/>
-          <a:lstStyle/>
-          <a:p>
-            <a:pPr algn="l" indent="0" marL="0">
-              <a:lnSpc>
-                <a:spcPts val="3600"/>
-              </a:lnSpc>
-              <a:buNone/>
-            </a:pPr>
-            <a:r>
-              <a:rPr lang="en-US" sz="2800" b="1" dirty="0">
-                <a:solidFill>
-                  <a:srgbClr val="962B7C"/>
-                </a:solidFill>
-                <a:latin typeface="Alexandria" pitchFamily="34" charset="0"/>
-                <a:ea typeface="Alexandria" pitchFamily="34" charset="-122"/>
-                <a:cs typeface="Alexandria" pitchFamily="34" charset="-120"/>
-              </a:rPr>
-              <a:t>10–35 phút</a:t>
-            </a:r>
-            <a:endParaRPr lang="en-US" sz="2800" dirty="0"/>
-          </a:p>
-        </p:txBody>
-      </p:sp>
-      <p:sp>
-        <p:nvSpPr>
-          <p:cNvPr id="9" name="Text 0"/>
+          <p:cNvPr id="8" name="Text 0"/>
           <p:cNvSpPr/>
           <p:nvPr>
             <p:ph idx="100" type="title" hasCustomPrompt="1"/>
@@ -40832,8 +40551,8 @@
         </p:nvSpPr>
         <p:spPr>
           <a:xfrm>
-            <a:off x="3840480" y="2103120"/>
-            <a:ext cx="6766560" cy="2194560"/>
+            <a:off x="3840480" y="2240280"/>
+            <a:ext cx="6766560" cy="2377440"/>
           </a:xfrm>
           <a:prstGeom prst="rect">
             <a:avLst/>
@@ -40842,7 +40561,7 @@
           <a:ln/>
         </p:spPr>
         <p:txBody>
-          <a:bodyPr wrap="square" lIns="76200" tIns="76200" rIns="76200" bIns="76200" rtlCol="0" anchor="t"/>
+          <a:bodyPr wrap="square" lIns="76200" tIns="76200" rIns="76200" bIns="76200" rtlCol="0" anchor="ctr"/>
           <a:lstStyle/>
           <a:p>
             <a:pPr algn="l" indent="0" marL="0">
